--- a/curso/pptx/S17.pptx
+++ b/curso/pptx/S17.pptx
@@ -7170,7 +7170,7 @@
                 </a:solidFill>
                 <a:latin typeface="Nunito Sans"/>
               </a:rPr>
-              <a:t>El nuevo tema suele ser más </a:t>
+              <a:t>新的话题通常更</a:t>
             </a:r>
             <a:r>
               <a:rPr sz="2800" b="1">
@@ -7179,7 +7179,7 @@
                 </a:solidFill>
                 <a:latin typeface="Nunito Sans"/>
               </a:rPr>
-              <a:t>interesante</a:t>
+              <a:t>有趣</a:t>
             </a:r>
           </a:p>
           <a:p>
@@ -7204,7 +7204,7 @@
                 </a:solidFill>
                 <a:latin typeface="Nunito Sans"/>
               </a:rPr>
-              <a:t>La pregunta de verdad se </a:t>
+              <a:t>真正的问题被</a:t>
             </a:r>
             <a:r>
               <a:rPr sz="2800" b="1">
@@ -7213,7 +7213,16 @@
                 </a:solidFill>
                 <a:latin typeface="Nunito Sans"/>
               </a:rPr>
-              <a:t>olvida</a:t>
+              <a:t>忘掉</a:t>
+            </a:r>
+            <a:r>
+              <a:rPr sz="2800" b="0">
+                <a:solidFill>
+                  <a:srgbClr val="1F2A44"/>
+                </a:solidFill>
+                <a:latin typeface="Nunito Sans"/>
+              </a:rPr>
+              <a:t>了</a:t>
             </a:r>
           </a:p>
           <a:p>
@@ -7238,7 +7247,7 @@
                 </a:solidFill>
                 <a:latin typeface="Nunito Sans"/>
               </a:rPr>
-              <a:t>En inglés, </a:t>
+              <a:t>在英语里叫 </a:t>
             </a:r>
             <a:r>
               <a:rPr sz="2800" b="1">
@@ -7256,7 +7265,7 @@
                 </a:solidFill>
                 <a:latin typeface="Nunito Sans"/>
               </a:rPr>
-              <a:t>: se cuenta que despistaba a los perros</a:t>
+              <a:t>（红鲱鱼）：据说它能让猎犬迷失方向</a:t>
             </a:r>
           </a:p>
           <a:p>
@@ -7281,7 +7290,7 @@
                 </a:solidFill>
                 <a:latin typeface="Nunito Sans"/>
               </a:rPr>
-              <a:t>Pregunta: </a:t>
+              <a:t>要问：</a:t>
             </a:r>
             <a:r>
               <a:rPr sz="2800" b="1">
@@ -7290,7 +7299,7 @@
                 </a:solidFill>
                 <a:latin typeface="Nunito Sans"/>
               </a:rPr>
-              <a:t>¿qué tiene que ver esto con lo que hablábamos?</a:t>
+              <a:t>这和我们刚才说的有什么关系？</a:t>
             </a:r>
           </a:p>
         </p:txBody>
@@ -7442,7 +7451,7 @@
                 </a:solidFill>
                 <a:latin typeface="Nunito Sans"/>
               </a:rPr>
-              <a:t>La respuesta habla de </a:t>
+              <a:t>回答说的是</a:t>
             </a:r>
             <a:r>
               <a:rPr sz="2800" b="1">
@@ -7451,7 +7460,7 @@
                 </a:solidFill>
                 <a:latin typeface="Nunito Sans"/>
               </a:rPr>
-              <a:t>otra cosa</a:t>
+              <a:t>别的事情</a:t>
             </a:r>
           </a:p>
           <a:p>
@@ -7476,7 +7485,7 @@
                 </a:solidFill>
                 <a:latin typeface="Nunito Sans"/>
               </a:rPr>
-              <a:t>Suele empezar con «ya, pero…» o «¿y qué me dices de…?»</a:t>
+              <a:t>常常以“是啊，但是……”或者“那……你怎么说？”开头</a:t>
             </a:r>
           </a:p>
           <a:p>
@@ -7501,7 +7510,7 @@
                 </a:solidFill>
                 <a:latin typeface="Nunito Sans"/>
               </a:rPr>
-              <a:t>Al final nadie recuerda la pregunta del principio</a:t>
+              <a:t>最后没有人记得一开始的问题</a:t>
             </a:r>
           </a:p>
           <a:p>
@@ -7526,7 +7535,7 @@
                 </a:solidFill>
                 <a:latin typeface="Nunito Sans"/>
               </a:rPr>
-              <a:t>No es mentir: es </a:t>
+              <a:t>它不是撒谎：它是</a:t>
             </a:r>
             <a:r>
               <a:rPr sz="2800" b="1">
@@ -7535,7 +7544,7 @@
                 </a:solidFill>
                 <a:latin typeface="Nunito Sans"/>
               </a:rPr>
-              <a:t>esquivar</a:t>
+              <a:t>躲闪</a:t>
             </a:r>
           </a:p>
         </p:txBody>

--- a/curso/pptx/S17.pptx
+++ b/curso/pptx/S17.pptx
@@ -4129,7 +4129,7 @@
                 </a:solidFill>
                 <a:latin typeface="Nunito Sans"/>
               </a:rPr>
-              <a:t>迪伦：“奥马尔，你为什么没问蕾雷就把她的照片发上去了？”奥马尔：“那你怎么不说说艾托发的那些照片？那些才叫糟糕！”</a:t>
+              <a:t>一个男孩：“你为什么没问一个女孩就把她的照片发上去了？”一个同学：“那你怎么不说说另一个同学发的那些照片？那些才叫糟糕！”</a:t>
             </a:r>
           </a:p>
         </p:txBody>
@@ -4177,7 +4177,7 @@
                 </a:solidFill>
                 <a:latin typeface="Nunito Sans"/>
               </a:rPr>
-              <a:t>在讨论什么？奥马尔发那张照片对不对。</a:t>
+              <a:t>在讨论什么？这个同学发那张照片对不对。</a:t>
             </a:r>
           </a:p>
           <a:p>
@@ -4202,7 +4202,7 @@
                 </a:solidFill>
                 <a:latin typeface="Nunito Sans"/>
               </a:rPr>
-              <a:t>奥马尔做了什么？他说起艾托的照片。</a:t>
+              <a:t>这个同学做了什么？他说起另一个同学的照片。</a:t>
             </a:r>
           </a:p>
           <a:p>
@@ -4227,7 +4227,7 @@
                 </a:solidFill>
                 <a:latin typeface="Nunito Sans"/>
               </a:rPr>
-              <a:t>这回答了问题吗？没有：就算艾托做得更糟，问题问的也是奥马尔。</a:t>
+              <a:t>这回答了问题吗？没有：就算另一个同学做得更糟，问题问的也是这个同学。</a:t>
             </a:r>
           </a:p>
           <a:p>
@@ -4438,7 +4438,7 @@
                 </a:solidFill>
                 <a:latin typeface="Nunito Sans"/>
               </a:rPr>
-              <a:t>雅斯敏和陈在争论看哪部剧。陈：“等一下，这个以后再说。你看到厨房冒烟了吗？”</a:t>
+              <a:t>一个女孩和一个男孩在争论看哪部剧。这个男孩：“等一下，这个以后再说。你看到厨房冒烟了吗？”</a:t>
             </a:r>
           </a:p>
         </p:txBody>
@@ -5210,7 +5210,7 @@
                 </a:solidFill>
                 <a:latin typeface="Nunito Sans"/>
               </a:rPr>
-              <a:t>奈亚拉的妈妈：“你做数学作业了吗？”奈亚拉：“数学老师请了一整个星期的假。”</a:t>
+              <a:t>一个女孩的妈妈：“你做数学作业了吗？”这个女孩：“数学老师请了一整个星期的假。”</a:t>
             </a:r>
           </a:p>
         </p:txBody>
@@ -6793,7 +6793,7 @@
                 </a:solidFill>
                 <a:latin typeface="Nunito Sans"/>
               </a:rPr>
-              <a:t>奈亚拉的妈妈：“你做作业了吗？”奈亚拉：“你知道毕尔巴鄂竞技（Athletic）签了一个新前锋吗？”</a:t>
+              <a:t>一个女孩的妈妈：“你做作业了吗？”这个女孩：“你知道毕尔巴鄂竞技（Athletic）签了一个新前锋吗？”</a:t>
             </a:r>
           </a:p>
         </p:txBody>
@@ -6832,7 +6832,7 @@
                 </a:solidFill>
                 <a:latin typeface="Nunito Sans"/>
               </a:rPr>
-              <a:t>奈亚拉回答了吗？她为什么要转移话题？</a:t>
+              <a:t>这个女孩回答了吗？她为什么要转移话题？</a:t>
             </a:r>
           </a:p>
         </p:txBody>
@@ -7834,7 +7834,7 @@
                 </a:solidFill>
                 <a:latin typeface="Nunito Sans"/>
               </a:rPr>
-              <a:t>奈亚拉的妈妈：“你做作业了吗？”奈亚拉：“你知道毕尔巴鄂竞技（Athletic）签了一个新前锋吗？”</a:t>
+              <a:t>一个女孩的妈妈：“你做作业了吗？”这个女孩：“你知道毕尔巴鄂竞技（Athletic）签了一个新前锋吗？”</a:t>
             </a:r>
           </a:p>
         </p:txBody>
